--- a/examples/repositories/native-math-showcase/deck.pptx
+++ b/examples/repositories/native-math-showcase/deck.pptx
@@ -139,13 +139,13 @@
           </c:tx>
           <c:spPr>
             <a:solidFill>
-              <a:srgbClr val="0173B2"/>
+              <a:srgbClr val="006B98"/>
             </a:solidFill>
             <a:effectLst/>
           </c:spPr>
           <c:invertIfNegative val="0"/>
           <c:dLbls>
-            <c:numFmt formatCode="#,##0" sourceLinked="0"/>
+            <c:numFmt formatCode="0" sourceLinked="0"/>
             <c:txPr>
               <a:bodyPr/>
               <a:lstStyle/>
@@ -153,7 +153,7 @@
                 <a:pPr>
                   <a:defRPr b="0" i="0" strike="noStrike" sz="1200" u="none">
                     <a:solidFill>
-                      <a:srgbClr val="000000"/>
+                      <a:srgbClr val="2D3436"/>
                     </a:solidFill>
                     <a:latin typeface="Arial"/>
                   </a:defRPr>
@@ -161,7 +161,7 @@
               </a:p>
             </c:txPr>
             <c:showLegendKey val="0"/>
-            <c:showVal val="0"/>
+            <c:showVal val="1"/>
             <c:showCatName val="0"/>
             <c:showSerName val="0"/>
             <c:showPercent val="0"/>
@@ -222,13 +222,13 @@
           </c:tx>
           <c:spPr>
             <a:solidFill>
-              <a:srgbClr val="DE8F05"/>
+              <a:srgbClr val="A65A00"/>
             </a:solidFill>
             <a:effectLst/>
           </c:spPr>
           <c:invertIfNegative val="0"/>
           <c:dLbls>
-            <c:numFmt formatCode="#,##0" sourceLinked="0"/>
+            <c:numFmt formatCode="0" sourceLinked="0"/>
             <c:txPr>
               <a:bodyPr/>
               <a:lstStyle/>
@@ -236,7 +236,7 @@
                 <a:pPr>
                   <a:defRPr b="0" i="0" strike="noStrike" sz="1200" u="none">
                     <a:solidFill>
-                      <a:srgbClr val="000000"/>
+                      <a:srgbClr val="2D3436"/>
                     </a:solidFill>
                     <a:latin typeface="Arial"/>
                   </a:defRPr>
@@ -244,7 +244,7 @@
               </a:p>
             </c:txPr>
             <c:showLegendKey val="0"/>
-            <c:showVal val="0"/>
+            <c:showVal val="1"/>
             <c:showCatName val="0"/>
             <c:showSerName val="0"/>
             <c:showPercent val="0"/>
@@ -290,7 +290,7 @@
           </c:val>
         </c:ser>
         <c:dLbls>
-          <c:numFmt formatCode="#,##0" sourceLinked="0"/>
+          <c:numFmt formatCode="0" sourceLinked="0"/>
           <c:txPr>
             <a:bodyPr/>
             <a:lstStyle/>
@@ -298,7 +298,7 @@
               <a:pPr>
                 <a:defRPr b="0" i="0" strike="noStrike" sz="1200" u="none">
                   <a:solidFill>
-                    <a:srgbClr val="000000"/>
+                    <a:srgbClr val="2D3436"/>
                   </a:solidFill>
                   <a:latin typeface="Arial"/>
                 </a:defRPr>
@@ -306,7 +306,7 @@
             </a:p>
           </c:txPr>
           <c:showLegendKey val="0"/>
-          <c:showVal val="0"/>
+          <c:showVal val="1"/>
           <c:showCatName val="0"/>
           <c:showSerName val="0"/>
           <c:showPercent val="0"/>
@@ -364,7 +364,7 @@
         <c:axId val="2094734552"/>
         <c:scaling>
           <c:orientation val="minMax"/>
-          <c:max val="25"/>
+          <c:max val="30"/>
           <c:min val="0"/>
         </c:scaling>
         <c:delete val="0"/>
@@ -411,7 +411,7 @@
         <c:crossAx val="2094734554"/>
         <c:crosses val="autoZero"/>
         <c:crossBetween val="between"/>
-        <c:majorUnit val="5"/>
+        <c:majorUnit val="10"/>
       </c:valAx>
       <c:spPr>
         <a:noFill/>
@@ -487,7 +487,7 @@
           </c:tx>
           <c:spPr>
             <a:solidFill>
-              <a:srgbClr val="0173B2"/>
+              <a:srgbClr val="006B98"/>
             </a:solidFill>
             <a:effectLst/>
           </c:spPr>
@@ -522,7 +522,7 @@
             <c:bubble3D val="0"/>
             <c:spPr>
               <a:solidFill>
-                <a:srgbClr val="0173B2"/>
+                <a:srgbClr val="006B98"/>
               </a:solidFill>
               <a:effectLst/>
             </c:spPr>
@@ -533,7 +533,7 @@
             <c:bubble3D val="0"/>
             <c:spPr>
               <a:solidFill>
-                <a:srgbClr val="DE8F05"/>
+                <a:srgbClr val="A65A00"/>
               </a:solidFill>
               <a:effectLst/>
             </c:spPr>
@@ -2058,7 +2058,7 @@
         <p:spPr>
           <a:xfrm>
             <a:off x="502920" y="1024128"/>
-            <a:ext cx="4663440" cy="1554480"/>
+            <a:ext cx="4206240" cy="1554480"/>
           </a:xfrm>
           <a:prstGeom prst="rect">
             <a:avLst/>
@@ -3670,7 +3670,7 @@
         </p:nvSpPr>
         <p:spPr>
           <a:xfrm>
-            <a:off x="4937760" y="1536192"/>
+            <a:off x="4937760" y="1627632"/>
             <a:ext cx="3657600" cy="960120"/>
           </a:xfrm>
           <a:prstGeom prst="rect">
@@ -3781,7 +3781,7 @@
         </p:nvSpPr>
         <p:spPr>
           <a:xfrm>
-            <a:off x="594360" y="3447288"/>
+            <a:off x="594360" y="3374136"/>
             <a:ext cx="4023360" cy="914400"/>
           </a:xfrm>
           <a:prstGeom prst="rect">
@@ -3887,8 +3887,8 @@
         </p:nvSpPr>
         <p:spPr>
           <a:xfrm>
-            <a:off x="4800600" y="3447288"/>
-            <a:ext cx="3749040" cy="914400"/>
+            <a:off x="4937760" y="3300984"/>
+            <a:ext cx="3657600" cy="914400"/>
           </a:xfrm>
           <a:prstGeom prst="rect">
             <a:avLst/>
@@ -3902,86 +3902,38 @@
           </a:bodyPr>
           <a:lstStyle/>
           <a:p>
-            <a:pPr algn="ctr" indent="0" marL="0">
+            <a:pPr indent="0" marL="0">
               <a:buNone/>
             </a:pPr>
-            <a14:m xmlns:a14="http://schemas.microsoft.com/office/drawing/2010/main">
-              <m:oMathPara xmlns:m="http://schemas.openxmlformats.org/officeDocument/2006/math">
-                <m:oMathParaPr>
-                  <m:jc m:val="center"/>
-                </m:oMathParaPr>
-                <m:oMath>
-                  <m:sSub>
-                    <m:e>
-                      <m:acc>
-                        <m:accPr>
-                          <m:chr m:val="‾"/>
-                        </m:accPr>
-                        <m:e>
-                          <m:r>
-                            <m:t>x</m:t>
-                          </m:r>
-                        </m:e>
-                      </m:acc>
-                    </m:e>
-                    <m:sub>
-                      <m:r>
-                        <m:t>B</m:t>
-                      </m:r>
-                    </m:sub>
-                  </m:sSub>
-                  <m:r>
-                    <m:rPr>
-                      <m:sty m:val="p"/>
-                    </m:rPr>
-                    <m:t>=</m:t>
-                  </m:r>
-                  <m:f>
-                    <m:fPr>
-                      <m:type m:val="bar"/>
-                    </m:fPr>
-                    <m:num>
-                      <m:r>
-                        <m:t>0</m:t>
-                      </m:r>
-                      <m:r>
-                        <m:rPr>
-                          <m:sty m:val="p"/>
-                        </m:rPr>
-                        <m:t>+</m:t>
-                      </m:r>
-                      <m:r>
-                        <m:t>5</m:t>
-                      </m:r>
-                      <m:r>
-                        <m:rPr>
-                          <m:sty m:val="p"/>
-                        </m:rPr>
-                        <m:t>+</m:t>
-                      </m:r>
-                      <m:r>
-                        <m:t>10</m:t>
-                      </m:r>
-                    </m:num>
-                    <m:den>
-                      <m:r>
-                        <m:t>3</m:t>
-                      </m:r>
-                    </m:den>
-                  </m:f>
-                  <m:r>
-                    <m:rPr>
-                      <m:sty m:val="p"/>
-                    </m:rPr>
-                    <m:t>=</m:t>
-                  </m:r>
-                  <m:r>
-                    <m:t>5</m:t>
-                  </m:r>
-                </m:oMath>
-              </m:oMathPara>
-            </a14:m>
-            <a:endParaRPr lang="en-US" sz="2500" dirty="0"/>
+            <a:r>
+              <a:rPr lang="en-US" sz="2000" dirty="0">
+                <a:solidFill>
+                  <a:srgbClr val="A65A00"/>
+                </a:solidFill>
+                <a:latin typeface="BIZ UDPGothic" pitchFamily="34" charset="0"/>
+                <a:ea typeface="BIZ UDPGothic" pitchFamily="34" charset="-122"/>
+                <a:cs typeface="BIZ UDPGothic" pitchFamily="34" charset="-120"/>
+              </a:rPr>
+              <a:t>Bも合計15点。</a:t>
+            </a:r>
+            <a:endParaRPr lang="en-US" sz="2000" dirty="0"/>
+          </a:p>
+          <a:p>
+            <a:pPr indent="0" marL="0">
+              <a:buNone/>
+            </a:pPr>
+            <a:r>
+              <a:rPr lang="en-US" sz="2000" dirty="0">
+                <a:solidFill>
+                  <a:srgbClr val="A65A00"/>
+                </a:solidFill>
+                <a:latin typeface="BIZ UDPGothic" pitchFamily="34" charset="0"/>
+                <a:ea typeface="BIZ UDPGothic" pitchFamily="34" charset="-122"/>
+                <a:cs typeface="BIZ UDPGothic" pitchFamily="34" charset="-120"/>
+              </a:rPr>
+              <a:t>3件で割ると平均は5点。</a:t>
+            </a:r>
+            <a:endParaRPr lang="en-US" sz="2000" dirty="0"/>
           </a:p>
         </p:txBody>
       </p:sp>
@@ -3993,7 +3945,7 @@
         </p:nvSpPr>
         <p:spPr>
           <a:xfrm>
-            <a:off x="594360" y="4416552"/>
+            <a:off x="594360" y="4343400"/>
             <a:ext cx="7955280" cy="228600"/>
           </a:xfrm>
           <a:prstGeom prst="rect">
@@ -4224,7 +4176,7 @@
         <p:spPr>
           <a:xfrm>
             <a:off x="548640" y="1417320"/>
-            <a:ext cx="8046720" cy="1005840"/>
+            <a:ext cx="8046720" cy="594360"/>
           </a:xfrm>
           <a:prstGeom prst="rect">
             <a:avLst/>
@@ -4238,130 +4190,21 @@
           </a:bodyPr>
           <a:lstStyle/>
           <a:p>
-            <a:pPr algn="ctr" indent="0" marL="0">
+            <a:pPr indent="0" marL="0">
               <a:buNone/>
             </a:pPr>
-            <a14:m xmlns:a14="http://schemas.microsoft.com/office/drawing/2010/main">
-              <m:oMathPara xmlns:m="http://schemas.openxmlformats.org/officeDocument/2006/math">
-                <m:oMathParaPr>
-                  <m:jc m:val="center"/>
-                </m:oMathParaPr>
-                <m:oMath>
-                  <m:sSup>
-                    <m:e>
-                      <m:r>
-                        <m:t>σ</m:t>
-                      </m:r>
-                    </m:e>
-                    <m:sup>
-                      <m:r>
-                        <m:t>2</m:t>
-                      </m:r>
-                    </m:sup>
-                  </m:sSup>
-                  <m:r>
-                    <m:rPr>
-                      <m:sty m:val="p"/>
-                    </m:rPr>
-                    <m:t>=</m:t>
-                  </m:r>
-                  <m:f>
-                    <m:fPr>
-                      <m:type m:val="bar"/>
-                    </m:fPr>
-                    <m:num>
-                      <m:r>
-                        <m:t>1</m:t>
-                      </m:r>
-                    </m:num>
-                    <m:den>
-                      <m:r>
-                        <m:t>n</m:t>
-                      </m:r>
-                    </m:den>
-                  </m:f>
-                  <m:nary>
-                    <m:naryPr>
-                      <m:chr m:val="∑"/>
-                      <m:limLoc m:val="undOvr"/>
-                      <m:subHide m:val="off"/>
-                      <m:supHide m:val="off"/>
-                    </m:naryPr>
-                    <m:sub>
-                      <m:r>
-                        <m:t>i</m:t>
-                      </m:r>
-                      <m:r>
-                        <m:rPr>
-                          <m:sty m:val="p"/>
-                        </m:rPr>
-                        <m:t>=</m:t>
-                      </m:r>
-                      <m:r>
-                        <m:t>1</m:t>
-                      </m:r>
-                    </m:sub>
-                    <m:sup>
-                      <m:r>
-                        <m:t>n</m:t>
-                      </m:r>
-                    </m:sup>
-                    <m:e>
-                      <m:r>
-                        <m:rPr>
-                          <m:sty m:val="p"/>
-                        </m:rPr>
-                        <m:t>(</m:t>
-                      </m:r>
-                    </m:e>
-                  </m:nary>
-                  <m:sSub>
-                    <m:e>
-                      <m:r>
-                        <m:t>x</m:t>
-                      </m:r>
-                    </m:e>
-                    <m:sub>
-                      <m:r>
-                        <m:t>i</m:t>
-                      </m:r>
-                    </m:sub>
-                  </m:sSub>
-                  <m:r>
-                    <m:rPr>
-                      <m:sty m:val="p"/>
-                    </m:rPr>
-                    <m:t>−</m:t>
-                  </m:r>
-                  <m:acc>
-                    <m:accPr>
-                      <m:chr m:val="‾"/>
-                    </m:accPr>
-                    <m:e>
-                      <m:r>
-                        <m:t>x</m:t>
-                      </m:r>
-                    </m:e>
-                  </m:acc>
-                  <m:sSup>
-                    <m:e>
-                      <m:r>
-                        <m:rPr>
-                          <m:sty m:val="p"/>
-                        </m:rPr>
-                        <m:t>)</m:t>
-                      </m:r>
-                    </m:e>
-                    <m:sup>
-                      <m:r>
-                        <m:t>2</m:t>
-                      </m:r>
-                    </m:sup>
-                  </m:sSup>
-                </m:oMath>
-              </m:oMathPara>
-            </a14:m>
-            <a:endParaRPr lang="en-US" sz="2900" dirty="0"/>
+            <a:r>
+              <a:rPr lang="en-US" sz="2500" b="1" dirty="0">
+                <a:solidFill>
+                  <a:srgbClr val="2D3436"/>
+                </a:solidFill>
+                <a:latin typeface="BIZ UDPGothic" pitchFamily="34" charset="0"/>
+                <a:ea typeface="BIZ UDPGothic" pitchFamily="34" charset="-122"/>
+                <a:cs typeface="BIZ UDPGothic" pitchFamily="34" charset="-120"/>
+              </a:rPr>
+              <a:t>平均との差を二乗 → 足す → 件数で割る</a:t>
+            </a:r>
+            <a:endParaRPr lang="en-US" sz="2500" dirty="0"/>
           </a:p>
         </p:txBody>
       </p:sp>
@@ -4389,8 +4232,8 @@
         </p:nvSpPr>
         <p:spPr>
           <a:xfrm>
-            <a:off x="731520" y="4151376"/>
-            <a:ext cx="3749040" cy="228600"/>
+            <a:off x="731520" y="2340864"/>
+            <a:ext cx="4114800" cy="182880"/>
           </a:xfrm>
           <a:prstGeom prst="rect">
             <a:avLst/>
@@ -4416,7 +4259,7 @@
                 <a:ea typeface="BIZ UDPGothic" pitchFamily="34" charset="-122"/>
                 <a:cs typeface="BIZ UDPGothic" pitchFamily="34" charset="-120"/>
               </a:rPr>
-              <a:t>二乗したずれの大きさ</a:t>
+              <a:t>二乗したずれ：A=1,0,1 ／ B=25,0,25</a:t>
             </a:r>
             <a:endParaRPr lang="en-US" sz="1100" dirty="0"/>
           </a:p>
@@ -4892,8 +4735,8 @@
         </p:nvSpPr>
         <p:spPr>
           <a:xfrm>
-            <a:off x="548640" y="1481328"/>
-            <a:ext cx="2834640" cy="914400"/>
+            <a:off x="594360" y="1554480"/>
+            <a:ext cx="3657600" cy="594360"/>
           </a:xfrm>
           <a:prstGeom prst="rect">
             <a:avLst/>
@@ -4907,48 +4750,21 @@
           </a:bodyPr>
           <a:lstStyle/>
           <a:p>
-            <a:pPr algn="ctr" indent="0" marL="0">
+            <a:pPr indent="0" marL="0">
               <a:buNone/>
             </a:pPr>
-            <a14:m xmlns:a14="http://schemas.microsoft.com/office/drawing/2010/main">
-              <m:oMathPara xmlns:m="http://schemas.openxmlformats.org/officeDocument/2006/math">
-                <m:oMathParaPr>
-                  <m:jc m:val="center"/>
-                </m:oMathParaPr>
-                <m:oMath>
-                  <m:r>
-                    <m:t>σ</m:t>
-                  </m:r>
-                  <m:r>
-                    <m:rPr>
-                      <m:sty m:val="p"/>
-                    </m:rPr>
-                    <m:t>=</m:t>
-                  </m:r>
-                  <m:rad>
-                    <m:radPr>
-                      <m:degHide m:val="on"/>
-                    </m:radPr>
-                    <m:deg/>
-                    <m:e>
-                      <m:sSup>
-                        <m:e>
-                          <m:r>
-                            <m:t>σ</m:t>
-                          </m:r>
-                        </m:e>
-                        <m:sup>
-                          <m:r>
-                            <m:t>2</m:t>
-                          </m:r>
-                        </m:sup>
-                      </m:sSup>
-                    </m:e>
-                  </m:rad>
-                </m:oMath>
-              </m:oMathPara>
-            </a14:m>
-            <a:endParaRPr lang="en-US" sz="3700" dirty="0"/>
+            <a:r>
+              <a:rPr lang="en-US" sz="2700" b="1" dirty="0">
+                <a:solidFill>
+                  <a:srgbClr val="2D3436"/>
+                </a:solidFill>
+                <a:latin typeface="BIZ UDPGothic" pitchFamily="34" charset="0"/>
+                <a:ea typeface="BIZ UDPGothic" pitchFamily="34" charset="-122"/>
+                <a:cs typeface="BIZ UDPGothic" pitchFamily="34" charset="-120"/>
+              </a:rPr>
+              <a:t>分散の平方根をとる</a:t>
+            </a:r>
+            <a:endParaRPr lang="en-US" sz="2700" dirty="0"/>
           </a:p>
         </p:txBody>
       </p:sp>
@@ -4960,8 +4776,8 @@
         </p:nvSpPr>
         <p:spPr>
           <a:xfrm>
-            <a:off x="4297680" y="1554480"/>
-            <a:ext cx="4206240" cy="749808"/>
+            <a:off x="4754880" y="1554480"/>
+            <a:ext cx="3794760" cy="749808"/>
           </a:xfrm>
           <a:prstGeom prst="rect">
             <a:avLst/>
@@ -5548,7 +5364,7 @@
           </p:nvPr>
         </p:nvGraphicFramePr>
         <p:xfrm>
-          <a:off x="594360" y="3511296"/>
+          <a:off x="594360" y="3401568"/>
           <a:ext cx="7863840" cy="914400"/>
         </p:xfrm>
         <a:graphic>
@@ -5569,14 +5385,14 @@
                       <a:pPr algn="ctr" indent="0" marL="0">
                         <a:buNone/>
                       </a:pPr>
-                      <a:endParaRPr lang="en-US" sz="1600" dirty="0">
+                      <a:endParaRPr lang="en-US" sz="1500" dirty="0">
                         <a:latin typeface="BIZ UDPGothic" charset="0"/>
                         <a:ea typeface="BIZ UDPGothic" charset="0"/>
                         <a:cs typeface="BIZ UDPGothic" charset="0"/>
                       </a:endParaRPr>
                     </a:p>
                   </a:txBody>
-                  <a:tcPr marL="63500" marR="63500" marT="63500" marB="63500">
+                  <a:tcPr marL="38100" marR="38100" marT="38100" marB="38100">
                     <a:lnL w="5080" cap="flat" cmpd="sng" algn="ctr">
                       <a:solidFill>
                         <a:srgbClr val="677276"/>
@@ -5627,7 +5443,7 @@
                         <a:buNone/>
                       </a:pPr>
                       <a:r>
-                        <a:rPr lang="en-US" sz="1600" dirty="0">
+                        <a:rPr lang="en-US" sz="1500" dirty="0">
                           <a:solidFill>
                             <a:srgbClr val="60B5E2"/>
                           </a:solidFill>
@@ -5637,14 +5453,14 @@
                         </a:rPr>
                         <a:t>A</a:t>
                       </a:r>
-                      <a:endParaRPr lang="en-US" sz="1600" dirty="0">
+                      <a:endParaRPr lang="en-US" sz="1500" dirty="0">
                         <a:latin typeface="BIZ UDPGothic" charset="0"/>
                         <a:ea typeface="BIZ UDPGothic" charset="0"/>
                         <a:cs typeface="BIZ UDPGothic" charset="0"/>
                       </a:endParaRPr>
                     </a:p>
                   </a:txBody>
-                  <a:tcPr marL="63500" marR="63500" marT="63500" marB="63500">
+                  <a:tcPr marL="38100" marR="38100" marT="38100" marB="38100">
                     <a:lnL w="5080" cap="flat" cmpd="sng" algn="ctr">
                       <a:solidFill>
                         <a:srgbClr val="677276"/>
@@ -5695,7 +5511,7 @@
                         <a:buNone/>
                       </a:pPr>
                       <a:r>
-                        <a:rPr lang="en-US" sz="1600" dirty="0">
+                        <a:rPr lang="en-US" sz="1500" dirty="0">
                           <a:solidFill>
                             <a:srgbClr val="F5B451"/>
                           </a:solidFill>
@@ -5705,14 +5521,14 @@
                         </a:rPr>
                         <a:t>B</a:t>
                       </a:r>
-                      <a:endParaRPr lang="en-US" sz="1600" dirty="0">
+                      <a:endParaRPr lang="en-US" sz="1500" dirty="0">
                         <a:latin typeface="BIZ UDPGothic" charset="0"/>
                         <a:ea typeface="BIZ UDPGothic" charset="0"/>
                         <a:cs typeface="BIZ UDPGothic" charset="0"/>
                       </a:endParaRPr>
                     </a:p>
                   </a:txBody>
-                  <a:tcPr marL="63500" marR="63500" marT="63500" marB="63500">
+                  <a:tcPr marL="38100" marR="38100" marT="38100" marB="38100">
                     <a:lnL w="5080" cap="flat" cmpd="sng" algn="ctr">
                       <a:solidFill>
                         <a:srgbClr val="677276"/>
@@ -5765,7 +5581,7 @@
                         <a:buNone/>
                       </a:pPr>
                       <a:r>
-                        <a:rPr lang="en-US" sz="1600" dirty="0">
+                        <a:rPr lang="en-US" sz="1500" dirty="0">
                           <a:solidFill>
                             <a:srgbClr val="FFFFFF"/>
                           </a:solidFill>
@@ -5775,14 +5591,14 @@
                         </a:rPr>
                         <a:t>平均（点）</a:t>
                       </a:r>
-                      <a:endParaRPr lang="en-US" sz="1600" dirty="0">
+                      <a:endParaRPr lang="en-US" sz="1500" dirty="0">
                         <a:latin typeface="BIZ UDPGothic" charset="0"/>
                         <a:ea typeface="BIZ UDPGothic" charset="0"/>
                         <a:cs typeface="BIZ UDPGothic" charset="0"/>
                       </a:endParaRPr>
                     </a:p>
                   </a:txBody>
-                  <a:tcPr marL="63500" marR="63500" marT="63500" marB="63500">
+                  <a:tcPr marL="38100" marR="38100" marT="38100" marB="38100">
                     <a:lnL w="5080" cap="flat" cmpd="sng" algn="ctr">
                       <a:solidFill>
                         <a:srgbClr val="677276"/>
@@ -5833,7 +5649,7 @@
                         <a:buNone/>
                       </a:pPr>
                       <a:r>
-                        <a:rPr lang="en-US" sz="1600" dirty="0">
+                        <a:rPr lang="en-US" sz="1500" dirty="0">
                           <a:solidFill>
                             <a:srgbClr val="FFFFFF"/>
                           </a:solidFill>
@@ -5843,14 +5659,14 @@
                         </a:rPr>
                         <a:t>5</a:t>
                       </a:r>
-                      <a:endParaRPr lang="en-US" sz="1600" dirty="0">
+                      <a:endParaRPr lang="en-US" sz="1500" dirty="0">
                         <a:latin typeface="BIZ UDPGothic" charset="0"/>
                         <a:ea typeface="BIZ UDPGothic" charset="0"/>
                         <a:cs typeface="BIZ UDPGothic" charset="0"/>
                       </a:endParaRPr>
                     </a:p>
                   </a:txBody>
-                  <a:tcPr marL="63500" marR="63500" marT="63500" marB="63500">
+                  <a:tcPr marL="38100" marR="38100" marT="38100" marB="38100">
                     <a:lnL w="5080" cap="flat" cmpd="sng" algn="ctr">
                       <a:solidFill>
                         <a:srgbClr val="677276"/>
@@ -5901,7 +5717,7 @@
                         <a:buNone/>
                       </a:pPr>
                       <a:r>
-                        <a:rPr lang="en-US" sz="1600" dirty="0">
+                        <a:rPr lang="en-US" sz="1500" dirty="0">
                           <a:solidFill>
                             <a:srgbClr val="FFFFFF"/>
                           </a:solidFill>
@@ -5911,14 +5727,14 @@
                         </a:rPr>
                         <a:t>5</a:t>
                       </a:r>
-                      <a:endParaRPr lang="en-US" sz="1600" dirty="0">
+                      <a:endParaRPr lang="en-US" sz="1500" dirty="0">
                         <a:latin typeface="BIZ UDPGothic" charset="0"/>
                         <a:ea typeface="BIZ UDPGothic" charset="0"/>
                         <a:cs typeface="BIZ UDPGothic" charset="0"/>
                       </a:endParaRPr>
                     </a:p>
                   </a:txBody>
-                  <a:tcPr marL="63500" marR="63500" marT="63500" marB="63500">
+                  <a:tcPr marL="38100" marR="38100" marT="38100" marB="38100">
                     <a:lnL w="5080" cap="flat" cmpd="sng" algn="ctr">
                       <a:solidFill>
                         <a:srgbClr val="677276"/>
@@ -5971,7 +5787,7 @@
                         <a:buNone/>
                       </a:pPr>
                       <a:r>
-                        <a:rPr lang="en-US" sz="1600" dirty="0">
+                        <a:rPr lang="en-US" sz="1500" dirty="0">
                           <a:solidFill>
                             <a:srgbClr val="FFFFFF"/>
                           </a:solidFill>
@@ -5981,14 +5797,14 @@
                         </a:rPr>
                         <a:t>標準偏差（点）</a:t>
                       </a:r>
-                      <a:endParaRPr lang="en-US" sz="1600" dirty="0">
+                      <a:endParaRPr lang="en-US" sz="1500" dirty="0">
                         <a:latin typeface="BIZ UDPGothic" charset="0"/>
                         <a:ea typeface="BIZ UDPGothic" charset="0"/>
                         <a:cs typeface="BIZ UDPGothic" charset="0"/>
                       </a:endParaRPr>
                     </a:p>
                   </a:txBody>
-                  <a:tcPr marL="63500" marR="63500" marT="63500" marB="63500">
+                  <a:tcPr marL="38100" marR="38100" marT="38100" marB="38100">
                     <a:lnL w="5080" cap="flat" cmpd="sng" algn="ctr">
                       <a:solidFill>
                         <a:srgbClr val="677276"/>
@@ -6039,7 +5855,7 @@
                         <a:buNone/>
                       </a:pPr>
                       <a:r>
-                        <a:rPr lang="en-US" sz="1600" dirty="0">
+                        <a:rPr lang="en-US" sz="1500" dirty="0">
                           <a:solidFill>
                             <a:srgbClr val="FFFFFF"/>
                           </a:solidFill>
@@ -6049,14 +5865,14 @@
                         </a:rPr>
                         <a:t>0.82</a:t>
                       </a:r>
-                      <a:endParaRPr lang="en-US" sz="1600" dirty="0">
+                      <a:endParaRPr lang="en-US" sz="1500" dirty="0">
                         <a:latin typeface="BIZ UDPGothic" charset="0"/>
                         <a:ea typeface="BIZ UDPGothic" charset="0"/>
                         <a:cs typeface="BIZ UDPGothic" charset="0"/>
                       </a:endParaRPr>
                     </a:p>
                   </a:txBody>
-                  <a:tcPr marL="63500" marR="63500" marT="63500" marB="63500">
+                  <a:tcPr marL="38100" marR="38100" marT="38100" marB="38100">
                     <a:lnL w="5080" cap="flat" cmpd="sng" algn="ctr">
                       <a:solidFill>
                         <a:srgbClr val="677276"/>
@@ -6107,7 +5923,7 @@
                         <a:buNone/>
                       </a:pPr>
                       <a:r>
-                        <a:rPr lang="en-US" sz="1600" dirty="0">
+                        <a:rPr lang="en-US" sz="1500" dirty="0">
                           <a:solidFill>
                             <a:srgbClr val="FFFFFF"/>
                           </a:solidFill>
@@ -6117,14 +5933,14 @@
                         </a:rPr>
                         <a:t>4.08</a:t>
                       </a:r>
-                      <a:endParaRPr lang="en-US" sz="1600" dirty="0">
+                      <a:endParaRPr lang="en-US" sz="1500" dirty="0">
                         <a:latin typeface="BIZ UDPGothic" charset="0"/>
                         <a:ea typeface="BIZ UDPGothic" charset="0"/>
                         <a:cs typeface="BIZ UDPGothic" charset="0"/>
                       </a:endParaRPr>
                     </a:p>
                   </a:txBody>
-                  <a:tcPr marL="63500" marR="63500" marT="63500" marB="63500">
+                  <a:tcPr marL="38100" marR="38100" marT="38100" marB="38100">
                     <a:lnL w="5080" cap="flat" cmpd="sng" algn="ctr">
                       <a:solidFill>
                         <a:srgbClr val="677276"/>
@@ -6179,7 +5995,7 @@
         </p:nvSpPr>
         <p:spPr>
           <a:xfrm>
-            <a:off x="594360" y="4517136"/>
+            <a:off x="594360" y="4443984"/>
             <a:ext cx="7955280" cy="182880"/>
           </a:xfrm>
           <a:prstGeom prst="rect">
